--- a/projects/BTL_slide_topic1_ppt169_20260718/exports/BTL_slide_hoan_chinh.pptx
+++ b/projects/BTL_slide_topic1_ppt169_20260718/exports/BTL_slide_hoan_chinh.pptx
@@ -9377,7 +9377,7 @@
               </a:defRPr>
             </a:pPr>
             <a:r>
-              <a:t>Kết quả được chốt từ metrics.json và capture .sla8 ngày 18/07/2026.</a:t>
+              <a:t>Kết quả được chốt từ metrics.json và capture .sla8.</a:t>
             </a:r>
           </a:p>
         </p:txBody>
